--- a/Schools_ML_Track/camp_2026/slides/ML/F01.pptx
+++ b/Schools_ML_Track/camp_2026/slides/ML/F01.pptx
@@ -119,7 +119,7 @@
   <p:extLst>
     <p:ext uri="{521415D9-36F7-43E2-AB2F-B90AF26B5E84}">
       <p14:sectionLst xmlns:p14="http://schemas.microsoft.com/office/powerpoint/2010/main">
-        <p14:section name="Opening" id="{493ef5a3-33ab-b708-54cb-55b16df02bd6}">
+        <p14:section name="Opening" id="{6aa56afb-7688-2b5f-8ced-663fbf778ff3}">
           <p14:sldIdLst>
             <p14:sldId id="256"/>
             <p14:sldId id="257"/>
@@ -129,7 +129,7 @@
             <p14:sldId id="261"/>
           </p14:sldIdLst>
         </p14:section>
-        <p14:section name="Block A" id="{c101603c-0e4c-9557-e971-16e125b944cd}">
+        <p14:section name="Block A" id="{7c15ee9d-3bb5-6fdc-845c-d26af1329a28}">
           <p14:sldIdLst>
             <p14:sldId id="262"/>
             <p14:sldId id="263"/>
@@ -137,7 +137,7 @@
             <p14:sldId id="265"/>
           </p14:sldIdLst>
         </p14:section>
-        <p14:section name="Make and close" id="{787a5bab-88c0-31d1-4599-66b8bb1eb3be}">
+        <p14:section name="Make and close" id="{9a4a5cd0-4c0e-8fa8-dccd-627f27c7af18}">
           <p14:sldIdLst>
             <p14:sldId id="266"/>
             <p14:sldId id="267"/>

--- a/Schools_ML_Track/camp_2026/slides/ML/F01.pptx
+++ b/Schools_ML_Track/camp_2026/slides/ML/F01.pptx
@@ -119,7 +119,7 @@
   <p:extLst>
     <p:ext uri="{521415D9-36F7-43E2-AB2F-B90AF26B5E84}">
       <p14:sectionLst xmlns:p14="http://schemas.microsoft.com/office/powerpoint/2010/main">
-        <p14:section name="Opening" id="{6aa56afb-7688-2b5f-8ced-663fbf778ff3}">
+        <p14:section name="Opening" id="{85f60e50-7066-0719-f581-e6af908998d7}">
           <p14:sldIdLst>
             <p14:sldId id="256"/>
             <p14:sldId id="257"/>
@@ -129,7 +129,7 @@
             <p14:sldId id="261"/>
           </p14:sldIdLst>
         </p14:section>
-        <p14:section name="Block A" id="{7c15ee9d-3bb5-6fdc-845c-d26af1329a28}">
+        <p14:section name="Block A" id="{dcffdcf9-d104-798a-5631-84fcc5510ed7}">
           <p14:sldIdLst>
             <p14:sldId id="262"/>
             <p14:sldId id="263"/>
@@ -137,7 +137,7 @@
             <p14:sldId id="265"/>
           </p14:sldIdLst>
         </p14:section>
-        <p14:section name="Make and close" id="{9a4a5cd0-4c0e-8fa8-dccd-627f27c7af18}">
+        <p14:section name="Make and close" id="{cd361d84-cfdb-ee3c-2ff3-c113f15bbbb1}">
           <p14:sldIdLst>
             <p14:sldId id="266"/>
             <p14:sldId id="267"/>
@@ -2362,7 +2362,24 @@
                 <a:ea typeface="Lato" pitchFamily="34" charset="-122"/>
                 <a:cs typeface="Lato" pitchFamily="34" charset="-120"/>
               </a:rPr>
-              <a:t>Numbers, names and predicting Python output</a:t>
+              <a:t>Numbers, names and</a:t>
+            </a:r>
+            <a:endParaRPr lang="en-US" sz="5600" dirty="0"/>
+          </a:p>
+          <a:p>
+            <a:pPr algn="l" indent="0" marL="0">
+              <a:buNone/>
+            </a:pPr>
+            <a:r>
+              <a:rPr lang="en-US" sz="5600" b="1" dirty="0">
+                <a:solidFill>
+                  <a:srgbClr val="FFFFFF"/>
+                </a:solidFill>
+                <a:latin typeface="Lato" pitchFamily="34" charset="0"/>
+                <a:ea typeface="Lato" pitchFamily="34" charset="-122"/>
+                <a:cs typeface="Lato" pitchFamily="34" charset="-120"/>
+              </a:rPr>
+              <a:t>predicting Python output</a:t>
             </a:r>
             <a:endParaRPr lang="en-US" sz="5600" dirty="0"/>
           </a:p>
@@ -3021,15 +3038,15 @@
           <a:p>
             <a:pPr algn="l" indent="0" marL="0">
               <a:lnSpc>
-                <a:spcPts val="3480"/>
+                <a:spcPts val="3240"/>
               </a:lnSpc>
               <a:spcAft>
-                <a:spcPts val="2520"/>
+                <a:spcPts val="2020"/>
               </a:spcAft>
               <a:buNone/>
             </a:pPr>
             <a:r>
-              <a:rPr lang="en-US" sz="2900" dirty="0">
+              <a:rPr lang="en-US" sz="2700" dirty="0">
                 <a:solidFill>
                   <a:srgbClr val="111111"/>
                 </a:solidFill>
@@ -3037,22 +3054,22 @@
                 <a:ea typeface="Lato" pitchFamily="34" charset="-122"/>
                 <a:cs typeface="Lato" pitchFamily="34" charset="-120"/>
               </a:rPr>
-              <a:t>In a new code cell calculate the price of 5 books at UGX 3000 each and print it. Change the quantity to 2 and recalculate. In a text cell explain why the old total did not change until you recalculated it. Save F01.ipynb.</a:t>
-            </a:r>
-            <a:endParaRPr lang="en-US" sz="2900" dirty="0"/>
-          </a:p>
-          <a:p>
-            <a:pPr algn="l" indent="0" marL="0">
-              <a:lnSpc>
-                <a:spcPts val="3480"/>
+              <a:t>In a new code cell calculate the price of 5 books at UGX 3000 each and print it.</a:t>
+            </a:r>
+            <a:endParaRPr lang="en-US" sz="2700" dirty="0"/>
+          </a:p>
+          <a:p>
+            <a:pPr algn="l" indent="0" marL="0">
+              <a:lnSpc>
+                <a:spcPts val="3240"/>
               </a:lnSpc>
               <a:spcAft>
-                <a:spcPts val="2520"/>
+                <a:spcPts val="2020"/>
               </a:spcAft>
               <a:buNone/>
             </a:pPr>
             <a:r>
-              <a:rPr lang="en-US" sz="2900" dirty="0">
+              <a:rPr lang="en-US" sz="2700" dirty="0">
                 <a:solidFill>
                   <a:srgbClr val="111111"/>
                 </a:solidFill>
@@ -3060,9 +3077,78 @@
                 <a:ea typeface="Lato" pitchFamily="34" charset="-122"/>
                 <a:cs typeface="Lato" pitchFamily="34" charset="-120"/>
               </a:rPr>
-              <a:t>Save it as F01. Write two sentences: what you changed and how you checked it.</a:t>
-            </a:r>
-            <a:endParaRPr lang="en-US" sz="2900" dirty="0"/>
+              <a:t>Change the quantity to 2 and recalculate.</a:t>
+            </a:r>
+            <a:endParaRPr lang="en-US" sz="2700" dirty="0"/>
+          </a:p>
+          <a:p>
+            <a:pPr algn="l" indent="0" marL="0">
+              <a:lnSpc>
+                <a:spcPts val="3240"/>
+              </a:lnSpc>
+              <a:spcAft>
+                <a:spcPts val="2020"/>
+              </a:spcAft>
+              <a:buNone/>
+            </a:pPr>
+            <a:r>
+              <a:rPr lang="en-US" sz="2700" dirty="0">
+                <a:solidFill>
+                  <a:srgbClr val="111111"/>
+                </a:solidFill>
+                <a:latin typeface="Lato" pitchFamily="34" charset="0"/>
+                <a:ea typeface="Lato" pitchFamily="34" charset="-122"/>
+                <a:cs typeface="Lato" pitchFamily="34" charset="-120"/>
+              </a:rPr>
+              <a:t>In a text cell explain why the old total did not change until you recalculated it.</a:t>
+            </a:r>
+            <a:endParaRPr lang="en-US" sz="2700" dirty="0"/>
+          </a:p>
+          <a:p>
+            <a:pPr algn="l" indent="0" marL="0">
+              <a:lnSpc>
+                <a:spcPts val="3240"/>
+              </a:lnSpc>
+              <a:spcAft>
+                <a:spcPts val="2020"/>
+              </a:spcAft>
+              <a:buNone/>
+            </a:pPr>
+            <a:r>
+              <a:rPr lang="en-US" sz="2700" dirty="0">
+                <a:solidFill>
+                  <a:srgbClr val="111111"/>
+                </a:solidFill>
+                <a:latin typeface="Lato" pitchFamily="34" charset="0"/>
+                <a:ea typeface="Lato" pitchFamily="34" charset="-122"/>
+                <a:cs typeface="Lato" pitchFamily="34" charset="-120"/>
+              </a:rPr>
+              <a:t>Save F01.ipynb.</a:t>
+            </a:r>
+            <a:endParaRPr lang="en-US" sz="2700" dirty="0"/>
+          </a:p>
+          <a:p>
+            <a:pPr algn="l" indent="0" marL="0">
+              <a:lnSpc>
+                <a:spcPts val="3240"/>
+              </a:lnSpc>
+              <a:spcAft>
+                <a:spcPts val="2020"/>
+              </a:spcAft>
+              <a:buNone/>
+            </a:pPr>
+            <a:r>
+              <a:rPr lang="en-US" sz="2700" dirty="0">
+                <a:solidFill>
+                  <a:srgbClr val="111111"/>
+                </a:solidFill>
+                <a:latin typeface="Lato" pitchFamily="34" charset="0"/>
+                <a:ea typeface="Lato" pitchFamily="34" charset="-122"/>
+                <a:cs typeface="Lato" pitchFamily="34" charset="-120"/>
+              </a:rPr>
+              <a:t>Write two sentences: what you changed and how you checked it.</a:t>
+            </a:r>
+            <a:endParaRPr lang="en-US" sz="2700" dirty="0"/>
           </a:p>
         </p:txBody>
       </p:sp>
